--- a/week13/Lecture13.pptx
+++ b/week13/Lecture13.pptx
@@ -217,7 +217,7 @@
           <a:p>
             <a:fld id="{634F3F22-B4BB-3F48-9180-464A9F2D66D1}" type="datetimeFigureOut">
               <a:rPr kumimoji="1" lang="zh-CN" altLang="en-US" smtClean="0"/>
-              <a:t>2025/5/20</a:t>
+              <a:t>2026/5/18</a:t>
             </a:fld>
             <a:endParaRPr kumimoji="1" lang="zh-CN" altLang="en-US"/>
           </a:p>
@@ -697,7 +697,7 @@
           <a:p>
             <a:fld id="{FC19A4FA-3D9A-4114-B0D5-759CBD56F1AB}" type="datetimeFigureOut">
               <a:rPr lang="zh-CN" altLang="en-US" smtClean="0"/>
-              <a:t>2025/5/20</a:t>
+              <a:t>2026/5/18</a:t>
             </a:fld>
             <a:endParaRPr lang="zh-CN" altLang="en-US"/>
           </a:p>
@@ -900,7 +900,7 @@
           <a:p>
             <a:fld id="{FC19A4FA-3D9A-4114-B0D5-759CBD56F1AB}" type="datetimeFigureOut">
               <a:rPr lang="zh-CN" altLang="en-US" smtClean="0"/>
-              <a:t>2025/5/20</a:t>
+              <a:t>2026/5/18</a:t>
             </a:fld>
             <a:endParaRPr lang="zh-CN" altLang="en-US"/>
           </a:p>
@@ -1078,7 +1078,7 @@
           <a:p>
             <a:fld id="{FC19A4FA-3D9A-4114-B0D5-759CBD56F1AB}" type="datetimeFigureOut">
               <a:rPr lang="zh-CN" altLang="en-US" smtClean="0"/>
-              <a:t>2025/5/20</a:t>
+              <a:t>2026/5/18</a:t>
             </a:fld>
             <a:endParaRPr lang="zh-CN" altLang="en-US"/>
           </a:p>
@@ -1302,7 +1302,7 @@
           <a:p>
             <a:fld id="{FC19A4FA-3D9A-4114-B0D5-759CBD56F1AB}" type="datetimeFigureOut">
               <a:rPr lang="zh-CN" altLang="en-US" smtClean="0"/>
-              <a:t>2025/5/20</a:t>
+              <a:t>2026/5/18</a:t>
             </a:fld>
             <a:endParaRPr lang="zh-CN" altLang="en-US"/>
           </a:p>
@@ -1536,7 +1536,7 @@
           <a:p>
             <a:fld id="{FC19A4FA-3D9A-4114-B0D5-759CBD56F1AB}" type="datetimeFigureOut">
               <a:rPr lang="zh-CN" altLang="en-US" smtClean="0"/>
-              <a:t>2025/5/20</a:t>
+              <a:t>2026/5/18</a:t>
             </a:fld>
             <a:endParaRPr lang="zh-CN" altLang="en-US"/>
           </a:p>
@@ -1935,7 +1935,7 @@
           <a:p>
             <a:fld id="{FC19A4FA-3D9A-4114-B0D5-759CBD56F1AB}" type="datetimeFigureOut">
               <a:rPr lang="zh-CN" altLang="en-US" smtClean="0"/>
-              <a:t>2025/5/20</a:t>
+              <a:t>2026/5/18</a:t>
             </a:fld>
             <a:endParaRPr lang="zh-CN" altLang="en-US"/>
           </a:p>
@@ -2215,7 +2215,7 @@
           <a:p>
             <a:fld id="{FC19A4FA-3D9A-4114-B0D5-759CBD56F1AB}" type="datetimeFigureOut">
               <a:rPr lang="zh-CN" altLang="en-US" smtClean="0"/>
-              <a:t>2025/5/20</a:t>
+              <a:t>2026/5/18</a:t>
             </a:fld>
             <a:endParaRPr lang="zh-CN" altLang="en-US"/>
           </a:p>
@@ -2367,7 +2367,7 @@
           <a:p>
             <a:fld id="{FC19A4FA-3D9A-4114-B0D5-759CBD56F1AB}" type="datetimeFigureOut">
               <a:rPr lang="zh-CN" altLang="en-US" smtClean="0"/>
-              <a:t>2025/5/20</a:t>
+              <a:t>2026/5/18</a:t>
             </a:fld>
             <a:endParaRPr lang="zh-CN" altLang="en-US"/>
           </a:p>
@@ -2497,7 +2497,7 @@
           <a:p>
             <a:fld id="{FC19A4FA-3D9A-4114-B0D5-759CBD56F1AB}" type="datetimeFigureOut">
               <a:rPr lang="zh-CN" altLang="en-US" smtClean="0"/>
-              <a:t>2025/5/20</a:t>
+              <a:t>2026/5/18</a:t>
             </a:fld>
             <a:endParaRPr lang="zh-CN" altLang="en-US"/>
           </a:p>
@@ -2807,7 +2807,7 @@
           <a:p>
             <a:fld id="{FC19A4FA-3D9A-4114-B0D5-759CBD56F1AB}" type="datetimeFigureOut">
               <a:rPr lang="zh-CN" altLang="en-US" smtClean="0"/>
-              <a:t>2025/5/20</a:t>
+              <a:t>2026/5/18</a:t>
             </a:fld>
             <a:endParaRPr lang="zh-CN" altLang="en-US"/>
           </a:p>
@@ -3094,7 +3094,7 @@
           <a:p>
             <a:fld id="{FC19A4FA-3D9A-4114-B0D5-759CBD56F1AB}" type="datetimeFigureOut">
               <a:rPr lang="zh-CN" altLang="en-US" smtClean="0"/>
-              <a:t>2025/5/20</a:t>
+              <a:t>2026/5/18</a:t>
             </a:fld>
             <a:endParaRPr lang="zh-CN" altLang="en-US"/>
           </a:p>
@@ -3387,7 +3387,7 @@
           <a:p>
             <a:fld id="{FC19A4FA-3D9A-4114-B0D5-759CBD56F1AB}" type="datetimeFigureOut">
               <a:rPr lang="zh-CN" altLang="en-US" smtClean="0"/>
-              <a:t>2025/5/20</a:t>
+              <a:t>2026/5/18</a:t>
             </a:fld>
             <a:endParaRPr lang="zh-CN" altLang="en-US"/>
           </a:p>
@@ -8695,7 +8695,7 @@
           <a:lstStyle/>
           <a:p>
             <a:r>
-              <a:rPr lang="en-US" altLang="zh-CN" dirty="0"/>
+              <a:rPr lang="en-US" altLang="zh-CN"/>
               <a:t>Class Templates</a:t>
             </a:r>
             <a:endParaRPr lang="zh-CN" altLang="en-US" dirty="0"/>
